--- a/media/exports/reports/2026-05/calls.pptx
+++ b/media/exports/reports/2026-05/calls.pptx
@@ -235,25 +235,25 @@
                 <c:formatCode>#,##0;[Red](#,##0)</c:formatCode>
                 <c:ptCount val="7"/>
                 <c:pt idx="0">
-                  <c:v>79</c:v>
+                  <c:v>82</c:v>
                 </c:pt>
                 <c:pt idx="1">
-                  <c:v>161</c:v>
+                  <c:v>162</c:v>
                 </c:pt>
                 <c:pt idx="2">
-                  <c:v>131</c:v>
+                  <c:v>144</c:v>
                 </c:pt>
                 <c:pt idx="3">
-                  <c:v>66</c:v>
+                  <c:v>72</c:v>
                 </c:pt>
                 <c:pt idx="4">
-                  <c:v>126</c:v>
+                  <c:v>119</c:v>
                 </c:pt>
                 <c:pt idx="5">
-                  <c:v>98</c:v>
+                  <c:v>82</c:v>
                 </c:pt>
                 <c:pt idx="6">
-                  <c:v>120</c:v>
+                  <c:v>96</c:v>
                 </c:pt>
               </c:numCache>
             </c:numRef>
@@ -317,7 +317,7 @@
       <c:valAx>
         <c:axId val="-2113994440"/>
         <c:scaling>
-          <c:max val="185.14999999999998"/>
+          <c:max val="186.29999999999998"/>
           <c:min val="0.0"/>
         </c:scaling>
         <c:delete/>
@@ -471,64 +471,64 @@
                 <c:formatCode>#,##0;[Red](#,##0)</c:formatCode>
                 <c:ptCount val="20"/>
                 <c:pt idx="0">
-                  <c:v>659</c:v>
+                  <c:v>685</c:v>
                 </c:pt>
                 <c:pt idx="1">
-                  <c:v>655</c:v>
+                  <c:v>633</c:v>
                 </c:pt>
                 <c:pt idx="2">
+                  <c:v>684</c:v>
+                </c:pt>
+                <c:pt idx="3">
+                  <c:v>690</c:v>
+                </c:pt>
+                <c:pt idx="4">
+                  <c:v>664</c:v>
+                </c:pt>
+                <c:pt idx="5">
                   <c:v>685</c:v>
                 </c:pt>
-                <c:pt idx="3">
-                  <c:v>714</c:v>
-                </c:pt>
-                <c:pt idx="4">
-                  <c:v>683</c:v>
-                </c:pt>
-                <c:pt idx="5">
-                  <c:v>725</c:v>
-                </c:pt>
                 <c:pt idx="6">
-                  <c:v>620</c:v>
+                  <c:v>629</c:v>
                 </c:pt>
                 <c:pt idx="7">
-                  <c:v>754</c:v>
+                  <c:v>724</c:v>
                 </c:pt>
                 <c:pt idx="8">
-                  <c:v>783</c:v>
+                  <c:v>820</c:v>
                 </c:pt>
                 <c:pt idx="9">
-                  <c:v>871</c:v>
+                  <c:v>909</c:v>
                 </c:pt>
                 <c:pt idx="10">
-                  <c:v>852</c:v>
+                  <c:v>826</c:v>
                 </c:pt>
                 <c:pt idx="11">
-                  <c:v>781</c:v>
+                  <c:v>756</c:v>
                 </c:pt>
                 <c:pt idx="12">
-                  <c:v>792</c:v>
+                  <c:v>770</c:v>
                 </c:pt>
                 <c:pt idx="13">
-                  <c:v>675</c:v>
+                  <c:v>746</c:v>
                 </c:pt>
                 <c:pt idx="14">
-                  <c:v>725</c:v>
+                  <c:v>776</c:v>
                 </c:pt>
                 <c:pt idx="15">
-                  <c:v>756</c:v>
+                  <c:v>726</c:v>
                 </c:pt>
                 <c:pt idx="16">
-                  <c:v>763</c:v>
+                  <c:v>678</c:v>
                 </c:pt>
                 <c:pt idx="17">
-                  <c:v>774</c:v>
+                  <c:v>865</c:v>
                 </c:pt>
                 <c:pt idx="18">
-                  <c:v>751</c:v>
+                  <c:v>731</c:v>
                 </c:pt>
                 <c:pt idx="19">
-                  <c:v>781</c:v>
+                  <c:v>757</c:v>
                 </c:pt>
               </c:numCache>
             </c:numRef>
@@ -1102,7 +1102,7 @@
           <a:lstStyle/>
           <a:p>
             <a:r>
-              <a:t>When do calls for help come in, and are we there to answer?. Calls for help, May: 781; Answered while staffed, May: 81.0%; Calls outside staffed hours, May: 54.2%; Median wait when answered, May: 76 sec. 781 calls for help came in during May. While the line was staffed, 81.0% were answered (target 90.0%); 54.2% of all calls came outside staffed hours and went to voicemail. The busiest time was 5 to 8pm (161 calls). 161 calls came between 5 and 8pm, when no-one is on the line. 68 callers hung up waiting while the line was staffed.</a:t>
+              <a:t>When do calls for help come in, and are we there to answer?. Calls for help, May: 757; Answered while staffed, May: 82.8%; Calls outside staffed hours, May: 55.4%; Median wait when answered, May: 84 sec. 757 calls for help came in during May. While the line was staffed, 82.8% were answered (target 90.0%); 55.4% of all calls came outside staffed hours and went to voicemail. The busiest time was 5 to 8pm (162 calls). 162 calls came between 5 and 8pm, when no-one is on the line. 58 callers hung up waiting while the line was staffed.</a:t>
             </a:r>
           </a:p>
         </p:txBody>
@@ -4587,7 +4587,7 @@
                 </a:solidFill>
                 <a:latin typeface="Roboto"/>
               </a:rPr>
-              <a:t>Data retrieved 2pm, Tue 6 Oct 2026 · Generated 8 Oct 2026, 6:42pm · Sample data · Made with Python (python-pptx)</a:t>
+              <a:t>Data retrieved 2pm, Tue 6 Oct 2026 · Generated 8 Oct 2026, 11:41pm · Sample data · Made with Python (python-pptx)</a:t>
             </a:r>
           </a:p>
         </p:txBody>
@@ -4933,7 +4933,7 @@
                 </a:solidFill>
                 <a:latin typeface="Roboto"/>
               </a:rPr>
-              <a:t>781</a:t>
+              <a:t>757</a:t>
             </a:r>
           </a:p>
         </p:txBody>
@@ -4972,7 +4972,7 @@
                 </a:solidFill>
                 <a:latin typeface="Roboto"/>
               </a:rPr>
-              <a:t>April 751</a:t>
+              <a:t>April 731</a:t>
             </a:r>
           </a:p>
         </p:txBody>
@@ -5099,7 +5099,7 @@
                 </a:solidFill>
                 <a:latin typeface="Roboto"/>
               </a:rPr>
-              <a:t>81.0%</a:t>
+              <a:t>82.8%</a:t>
             </a:r>
           </a:p>
         </p:txBody>
@@ -5265,7 +5265,7 @@
                 </a:solidFill>
                 <a:latin typeface="Roboto"/>
               </a:rPr>
-              <a:t>54.2%</a:t>
+              <a:t>55.4%</a:t>
             </a:r>
           </a:p>
         </p:txBody>
@@ -5304,7 +5304,7 @@
                 </a:solidFill>
                 <a:latin typeface="Roboto"/>
               </a:rPr>
-              <a:t>423 calls to voicemail</a:t>
+              <a:t>419 calls to voicemail</a:t>
             </a:r>
           </a:p>
         </p:txBody>
@@ -5431,7 +5431,7 @@
                 </a:solidFill>
                 <a:latin typeface="Roboto"/>
               </a:rPr>
-              <a:t>76 sec</a:t>
+              <a:t>84 sec</a:t>
             </a:r>
           </a:p>
         </p:txBody>
@@ -5470,7 +5470,7 @@
                 </a:solidFill>
                 <a:latin typeface="Roboto"/>
               </a:rPr>
-              <a:t>290 answered calls</a:t>
+              <a:t>280 answered calls</a:t>
             </a:r>
           </a:p>
         </p:txBody>
@@ -5615,7 +5615,7 @@
                 </a:solidFill>
                 <a:latin typeface="Roboto"/>
               </a:rPr>
-              <a:t>781 calls for help came in during May. While the line was staffed, 81.0% were answered (target 90.0%); 54.2% of all calls came outside staffed hours and went to voicemail. The busiest time was 5 to 8pm (161 calls).</a:t>
+              <a:t>757 calls for help came in during May. While the line was staffed, 82.8% were answered (target 90.0%); 55.4% of all calls came outside staffed hours and went to voicemail. The busiest time was 5 to 8pm (162 calls).</a:t>
             </a:r>
           </a:p>
         </p:txBody>
@@ -5742,7 +5742,7 @@
                 </a:solidFill>
                 <a:latin typeface="Roboto"/>
               </a:rPr>
-              <a:t>161 calls came between 5 and 8pm, when no-one is on the line. 68 callers hung up waiting while the line was staffed.</a:t>
+              <a:t>162 calls came between 5 and 8pm, when no-one is on the line. 58 callers hung up waiting while the line was staffed.</a:t>
             </a:r>
           </a:p>
         </p:txBody>
@@ -5820,7 +5820,7 @@
                 </a:solidFill>
                 <a:latin typeface="Roboto"/>
               </a:rPr>
-              <a:t>Data retrieved 2pm, Tue 6 Oct 2026 · Generated 8 Oct 2026, 6:42pm · Sample data · Made with Python (python-pptx)</a:t>
+              <a:t>Data retrieved 2pm, Tue 6 Oct 2026 · Generated 8 Oct 2026, 11:41pm · Sample data · Made with Python (python-pptx)</a:t>
             </a:r>
           </a:p>
         </p:txBody>
@@ -6135,7 +6135,7 @@
                 </a:solidFill>
                 <a:latin typeface="Roboto"/>
               </a:rPr>
-              <a:t>Data retrieved 2pm, Tue 6 Oct 2026 · Generated 8 Oct 2026, 6:42pm · Sample data · Made with Python (python-pptx)</a:t>
+              <a:t>Data retrieved 2pm, Tue 6 Oct 2026 · Generated 8 Oct 2026, 11:41pm · Sample data · Made with Python (python-pptx)</a:t>
             </a:r>
           </a:p>
         </p:txBody>

--- a/media/exports/reports/2026-05/calls.pptx
+++ b/media/exports/reports/2026-05/calls.pptx
@@ -1032,7 +1032,7 @@
           <a:lstStyle/>
           <a:p>
             <a:r>
-              <a:t>When do calls for help come in, and are we there to answer?. Sample Community Services Ltd. Period: May 2026. Every call to the help line: when it came in, whether someone answered, and how long the caller waited. The line is staffed 8:30am to 5pm on working days.</a:t>
+              <a:t>When do calls for help come in, and are we there to answer?. Sample Community Services Ltd. Period: May 2026. In short: 757 calls in May: 82.8% answered while staffed (target 90.0%); 55.4% came outside staffed hours. Every call to the help line: when it came in, whether someone answered, and how long the caller waited. The line is staffed 8:30am to 5pm on working days.</a:t>
             </a:r>
           </a:p>
         </p:txBody>
@@ -4397,7 +4397,7 @@
         <p:spPr>
           <a:xfrm>
             <a:off x="457200" y="3703320"/>
-            <a:ext cx="11277295" cy="535940"/>
+            <a:ext cx="11277295" cy="758190"/>
           </a:xfrm>
           <a:prstGeom prst="rect">
             <a:avLst/>
@@ -4422,7 +4422,7 @@
                 </a:solidFill>
                 <a:latin typeface="Roboto"/>
               </a:rPr>
-              <a:t>Period: May 2026. Every call to the help line: when it came in, whether someone answered, and how long the caller waited. The line is staffed 8:30am to 5pm on working days.</a:t>
+              <a:t>Period: May 2026. In short: 757 calls in May: 82.8% answered while staffed (target 90.0%); 55.4% came outside staffed hours. Every call to the help line: when it came in, whether someone answered, and how long the caller waited. The line is staffed 8:30am to 5pm on working days.</a:t>
             </a:r>
           </a:p>
         </p:txBody>
@@ -4435,7 +4435,7 @@
         </p:nvSpPr>
         <p:spPr>
           <a:xfrm>
-            <a:off x="457200" y="4330700"/>
+            <a:off x="457200" y="4552950"/>
             <a:ext cx="11277295" cy="1097280"/>
           </a:xfrm>
           <a:prstGeom prst="rect">
@@ -4587,7 +4587,7 @@
                 </a:solidFill>
                 <a:latin typeface="Roboto"/>
               </a:rPr>
-              <a:t>Data retrieved 2pm, Tue 6 Oct 2026 · Generated 8 Oct 2026, 11:41pm · Sample data · Made with Python (python-pptx)</a:t>
+              <a:t>Data retrieved 2pm, Tue 6 Oct 2026 · Generated 10 Oct 2026, 9:55pm · Sample data · Made with Python (python-pptx)</a:t>
             </a:r>
           </a:p>
         </p:txBody>
@@ -5820,7 +5820,7 @@
                 </a:solidFill>
                 <a:latin typeface="Roboto"/>
               </a:rPr>
-              <a:t>Data retrieved 2pm, Tue 6 Oct 2026 · Generated 8 Oct 2026, 11:41pm · Sample data · Made with Python (python-pptx)</a:t>
+              <a:t>Data retrieved 2pm, Tue 6 Oct 2026 · Generated 10 Oct 2026, 9:55pm · Sample data · Made with Python (python-pptx)</a:t>
             </a:r>
           </a:p>
         </p:txBody>
@@ -6135,7 +6135,7 @@
                 </a:solidFill>
                 <a:latin typeface="Roboto"/>
               </a:rPr>
-              <a:t>Data retrieved 2pm, Tue 6 Oct 2026 · Generated 8 Oct 2026, 11:41pm · Sample data · Made with Python (python-pptx)</a:t>
+              <a:t>Data retrieved 2pm, Tue 6 Oct 2026 · Generated 10 Oct 2026, 9:55pm · Sample data · Made with Python (python-pptx)</a:t>
             </a:r>
           </a:p>
         </p:txBody>
